--- a/Research/Phase 1/RP1_U23AI035_slides.pptx
+++ b/Research/Phase 1/RP1_U23AI035_slides.pptx
@@ -1729,7 +1729,7 @@
           </a:prstGeom>
           <a:extLst>
             <a:ext uri="{C572A759-6A51-4108-AA02-DFA0A04FC94B}">
-              <ma14:wrappingTextBoxFlag xmlns:ma14="http://schemas.microsoft.com/office/mac/drawingml/2011/main" xmlns="" val="0"/>
+              <ma14:wrappingTextBoxFlag xmlns="" xmlns:ma14="http://schemas.microsoft.com/office/mac/drawingml/2011/main" val="0"/>
             </a:ext>
           </a:extLst>
         </p:spPr>
@@ -1804,7 +1804,7 @@
           </a:prstGeom>
           <a:extLst>
             <a:ext uri="{C572A759-6A51-4108-AA02-DFA0A04FC94B}">
-              <ma14:wrappingTextBoxFlag xmlns:ma14="http://schemas.microsoft.com/office/mac/drawingml/2011/main" xmlns="" val="0"/>
+              <ma14:wrappingTextBoxFlag xmlns="" xmlns:ma14="http://schemas.microsoft.com/office/mac/drawingml/2011/main" val="0"/>
             </a:ext>
           </a:extLst>
         </p:spPr>
@@ -2254,7 +2254,7 @@
                   <a:schemeClr val="bg1"/>
                 </a:solidFill>
               </a:rPr>
-              <a:t>Name: Jaival Chauhan     Roll No.: U23AI035</a:t>
+              <a:t>Name: Jaival, Parth &amp; Vikram     Roll No.: 35, 87 &amp; 34</a:t>
             </a:r>
             <a:endParaRPr lang="en-US" sz="1400" dirty="0"/>
           </a:p>
@@ -3026,7 +3026,7 @@
           </a:prstGeom>
           <a:extLst>
             <a:ext uri="{C572A759-6A51-4108-AA02-DFA0A04FC94B}">
-              <ma14:wrappingTextBoxFlag xmlns:ma14="http://schemas.microsoft.com/office/mac/drawingml/2011/main" xmlns="" val="0"/>
+              <ma14:wrappingTextBoxFlag xmlns="" xmlns:ma14="http://schemas.microsoft.com/office/mac/drawingml/2011/main" val="0"/>
             </a:ext>
           </a:extLst>
         </p:spPr>
@@ -4079,7 +4079,7 @@
           </a:prstGeom>
           <a:extLst>
             <a:ext uri="{C572A759-6A51-4108-AA02-DFA0A04FC94B}">
-              <ma14:wrappingTextBoxFlag xmlns:ma14="http://schemas.microsoft.com/office/mac/drawingml/2011/main" xmlns="" val="0"/>
+              <ma14:wrappingTextBoxFlag xmlns="" xmlns:ma14="http://schemas.microsoft.com/office/mac/drawingml/2011/main" val="0"/>
             </a:ext>
           </a:extLst>
         </p:spPr>
@@ -4193,7 +4193,7 @@
         </p:nvSpPr>
         <p:spPr>
           <a:xfrm>
-            <a:off x="5760720" y="1143000"/>
+            <a:off x="5748609" y="1325880"/>
             <a:ext cx="2926080" cy="3429000"/>
           </a:xfrm>
           <a:prstGeom prst="roundRect">
@@ -4596,7 +4596,7 @@
           </a:prstGeom>
           <a:extLst>
             <a:ext uri="{C572A759-6A51-4108-AA02-DFA0A04FC94B}">
-              <ma14:wrappingTextBoxFlag xmlns:ma14="http://schemas.microsoft.com/office/mac/drawingml/2011/main" xmlns="" val="0"/>
+              <ma14:wrappingTextBoxFlag xmlns="" xmlns:ma14="http://schemas.microsoft.com/office/mac/drawingml/2011/main" val="0"/>
             </a:ext>
           </a:extLst>
         </p:spPr>
@@ -5202,7 +5202,7 @@
           </a:prstGeom>
           <a:extLst>
             <a:ext uri="{C572A759-6A51-4108-AA02-DFA0A04FC94B}">
-              <ma14:wrappingTextBoxFlag xmlns:ma14="http://schemas.microsoft.com/office/mac/drawingml/2011/main" xmlns="" val="0"/>
+              <ma14:wrappingTextBoxFlag xmlns="" xmlns:ma14="http://schemas.microsoft.com/office/mac/drawingml/2011/main" val="0"/>
             </a:ext>
           </a:extLst>
         </p:spPr>
@@ -5808,7 +5808,7 @@
           </a:prstGeom>
           <a:extLst>
             <a:ext uri="{C572A759-6A51-4108-AA02-DFA0A04FC94B}">
-              <ma14:wrappingTextBoxFlag xmlns:ma14="http://schemas.microsoft.com/office/mac/drawingml/2011/main" xmlns="" val="0"/>
+              <ma14:wrappingTextBoxFlag xmlns="" xmlns:ma14="http://schemas.microsoft.com/office/mac/drawingml/2011/main" val="0"/>
             </a:ext>
           </a:extLst>
         </p:spPr>
@@ -6343,7 +6343,7 @@
           </a:prstGeom>
           <a:extLst>
             <a:ext uri="{C572A759-6A51-4108-AA02-DFA0A04FC94B}">
-              <ma14:wrappingTextBoxFlag xmlns:ma14="http://schemas.microsoft.com/office/mac/drawingml/2011/main" xmlns="" val="0"/>
+              <ma14:wrappingTextBoxFlag xmlns="" xmlns:ma14="http://schemas.microsoft.com/office/mac/drawingml/2011/main" val="0"/>
             </a:ext>
           </a:extLst>
         </p:spPr>
@@ -7348,7 +7348,7 @@
           </a:prstGeom>
           <a:extLst>
             <a:ext uri="{C572A759-6A51-4108-AA02-DFA0A04FC94B}">
-              <ma14:wrappingTextBoxFlag xmlns:ma14="http://schemas.microsoft.com/office/mac/drawingml/2011/main" xmlns="" val="0"/>
+              <ma14:wrappingTextBoxFlag xmlns="" xmlns:ma14="http://schemas.microsoft.com/office/mac/drawingml/2011/main" val="0"/>
             </a:ext>
           </a:extLst>
         </p:spPr>
